--- a/course/slides/practical-offline/실전반_오프라인_01회차.pptx
+++ b/course/slides/practical-offline/실전반_오프라인_01회차.pptx
@@ -8399,7 +8399,7 @@
                 <a:ea typeface="맑은 고딕"/>
                 <a:cs typeface="맑은 고딕"/>
               </a:rPr>
-              <a:t>• HYD는 Neo4j를 쓴다</a:t>
+              <a:t>• 이 역할에는 Neo4j 같은 것이 있다</a:t>
             </a:r>
           </a:p>
         </p:txBody>
@@ -8639,7 +8639,7 @@
                 <a:ea typeface="맑은 고딕"/>
                 <a:cs typeface="맑은 고딕"/>
               </a:rPr>
-              <a:t>• 이 정의에 맞춰 실제 대상을 채워 Neo4j에 저장한 것이 HYD의 지식 그래프이다</a:t>
+              <a:t>• 이 정의에 맞춰 실제 대상을 채워 그래프 DB에 저장한 것이 HYD의 지식 그래프이다</a:t>
             </a:r>
           </a:p>
         </p:txBody>
@@ -8932,7 +8932,7 @@
       </p:sp>
       <p:pic>
         <p:nvPicPr>
-          <p:cNvPr id="6" name="삽화:노드관계.svg" descr="illust_7867290324536962592_1791712364.png"/>
+          <p:cNvPr id="6" name="삽화:노드관계.svg" descr="illust_8629601123116398587_1791712364.png"/>
           <p:cNvPicPr>
             <a:picLocks noChangeAspect="1"/>
           </p:cNvPicPr>
@@ -9528,7 +9528,7 @@
       </p:sp>
       <p:pic>
         <p:nvPicPr>
-          <p:cNvPr id="6" name="삽화:관계.svg" descr="illust_6599881522464788383_1791712364.png"/>
+          <p:cNvPr id="6" name="삽화:관계.svg" descr="illust_6281145406715579133_1791712364.png"/>
           <p:cNvPicPr>
             <a:picLocks noChangeAspect="1"/>
           </p:cNvPicPr>
@@ -11153,7 +11153,7 @@
       </p:sp>
       <p:pic>
         <p:nvPicPr>
-          <p:cNvPr id="6" name="삽화:속성_3.svg" descr="illust_390176831963700262_1791717240.png"/>
+          <p:cNvPr id="6" name="삽화:속성_3.svg" descr="illust_3671858717996485901_1791717240.png"/>
           <p:cNvPicPr>
             <a:picLocks noChangeAspect="1"/>
           </p:cNvPicPr>
@@ -12053,7 +12053,7 @@
       </p:sp>
       <p:pic>
         <p:nvPicPr>
-          <p:cNvPr id="6" name="삽화:두층_3.svg" descr="illust_3822485580918092868_1791717240.png"/>
+          <p:cNvPr id="6" name="삽화:두층_3.svg" descr="illust_8099933101517935850_1791717240.png"/>
           <p:cNvPicPr>
             <a:picLocks noChangeAspect="1"/>
           </p:cNvPicPr>
@@ -13152,7 +13152,7 @@
       </p:sp>
       <p:pic>
         <p:nvPicPr>
-          <p:cNvPr id="6" name="삽화:여러노드.svg" descr="illust_652074102767116383_1791717240.png"/>
+          <p:cNvPr id="6" name="삽화:여러노드.svg" descr="illust_6436818461076906257_1791717240.png"/>
           <p:cNvPicPr>
             <a:picLocks noChangeAspect="1"/>
           </p:cNvPicPr>
@@ -17937,7 +17937,7 @@
       </p:sp>
       <p:pic>
         <p:nvPicPr>
-          <p:cNvPr id="6" name="삽화:속성그래프_3.svg" descr="illust_7536753487645656453_1791717240.png"/>
+          <p:cNvPr id="6" name="삽화:속성그래프_3.svg" descr="illust_8964297649267677201_1791717240.png"/>
           <p:cNvPicPr>
             <a:picLocks noChangeAspect="1"/>
           </p:cNvPicPr>
@@ -20831,7 +20831,7 @@
       </p:sp>
       <p:pic>
         <p:nvPicPr>
-          <p:cNvPr id="6" name="삽화:경로질의_2.svg" descr="illust_917781770057827228_1791717240.png"/>
+          <p:cNvPr id="6" name="삽화:경로질의_2.svg" descr="illust_8114574556608139953_1791717240.png"/>
           <p:cNvPicPr>
             <a:picLocks noChangeAspect="1"/>
           </p:cNvPicPr>
@@ -33508,7 +33508,7 @@
       </p:sp>
       <p:pic>
         <p:nvPicPr>
-          <p:cNvPr id="6" name="삽화:설비_유압파워팩.svg" descr="illust_6396597276786989223_1791712364.png"/>
+          <p:cNvPr id="6" name="삽화:설비_유압파워팩.svg" descr="illust_471409922217336596_1791712364.png"/>
           <p:cNvPicPr>
             <a:picLocks noChangeAspect="1"/>
           </p:cNvPicPr>
@@ -35208,7 +35208,7 @@
       </p:sp>
       <p:pic>
         <p:nvPicPr>
-          <p:cNvPr id="6" name="삽화:원인후보.svg" descr="illust_6390954132444023213_1791712364.png"/>
+          <p:cNvPr id="6" name="삽화:원인후보.svg" descr="illust_3382546911389269495_1791712364.png"/>
           <p:cNvPicPr>
             <a:picLocks noChangeAspect="1"/>
           </p:cNvPicPr>
@@ -36747,7 +36747,7 @@
       </p:sp>
       <p:pic>
         <p:nvPicPr>
-          <p:cNvPr id="6" name="삽화:흩어진정보.svg" descr="illust_6886381014985186415_1791712364.png"/>
+          <p:cNvPr id="6" name="삽화:흩어진정보.svg" descr="illust_6522575610301938907_1791712364.png"/>
           <p:cNvPicPr>
             <a:picLocks noChangeAspect="1"/>
           </p:cNvPicPr>
@@ -36806,7 +36806,7 @@
                 <a:ea typeface="맑은 고딕"/>
                 <a:cs typeface="맑은 고딕"/>
               </a:rPr>
-              <a:t>시계열 DB(TimescaleDB)</a:t>
+              <a:t>시계열 DB</a:t>
             </a:r>
           </a:p>
           <a:p>

--- a/course/slides/practical-offline/실전반_오프라인_01회차.pptx
+++ b/course/slides/practical-offline/실전반_오프라인_01회차.pptx
@@ -8932,7 +8932,7 @@
       </p:sp>
       <p:pic>
         <p:nvPicPr>
-          <p:cNvPr id="6" name="삽화:노드관계.svg" descr="illust_8629601123116398587_1791712364.png"/>
+          <p:cNvPr id="6" name="삽화:노드관계.svg" descr="illust_5266731766817450087_1791712364.png"/>
           <p:cNvPicPr>
             <a:picLocks noChangeAspect="1"/>
           </p:cNvPicPr>
@@ -9528,7 +9528,7 @@
       </p:sp>
       <p:pic>
         <p:nvPicPr>
-          <p:cNvPr id="6" name="삽화:관계.svg" descr="illust_6281145406715579133_1791712364.png"/>
+          <p:cNvPr id="6" name="삽화:관계.svg" descr="illust_2435265418410359055_1791712364.png"/>
           <p:cNvPicPr>
             <a:picLocks noChangeAspect="1"/>
           </p:cNvPicPr>
@@ -11153,7 +11153,7 @@
       </p:sp>
       <p:pic>
         <p:nvPicPr>
-          <p:cNvPr id="6" name="삽화:속성_3.svg" descr="illust_3671858717996485901_1791717240.png"/>
+          <p:cNvPr id="6" name="삽화:속성_3.svg" descr="illust_6615320472600019611_1791717240.png"/>
           <p:cNvPicPr>
             <a:picLocks noChangeAspect="1"/>
           </p:cNvPicPr>
@@ -12053,7 +12053,7 @@
       </p:sp>
       <p:pic>
         <p:nvPicPr>
-          <p:cNvPr id="6" name="삽화:두층_3.svg" descr="illust_8099933101517935850_1791717240.png"/>
+          <p:cNvPr id="6" name="삽화:두층_3.svg" descr="illust_2930574664814283529_1791717240.png"/>
           <p:cNvPicPr>
             <a:picLocks noChangeAspect="1"/>
           </p:cNvPicPr>
@@ -13152,7 +13152,7 @@
       </p:sp>
       <p:pic>
         <p:nvPicPr>
-          <p:cNvPr id="6" name="삽화:여러노드.svg" descr="illust_6436818461076906257_1791717240.png"/>
+          <p:cNvPr id="6" name="삽화:여러노드.svg" descr="illust_6867457382987765658_1791717240.png"/>
           <p:cNvPicPr>
             <a:picLocks noChangeAspect="1"/>
           </p:cNvPicPr>
@@ -17937,7 +17937,7 @@
       </p:sp>
       <p:pic>
         <p:nvPicPr>
-          <p:cNvPr id="6" name="삽화:속성그래프_3.svg" descr="illust_8964297649267677201_1791717240.png"/>
+          <p:cNvPr id="6" name="삽화:속성그래프_3.svg" descr="illust_3791173995094343989_1791717240.png"/>
           <p:cNvPicPr>
             <a:picLocks noChangeAspect="1"/>
           </p:cNvPicPr>
@@ -20831,7 +20831,7 @@
       </p:sp>
       <p:pic>
         <p:nvPicPr>
-          <p:cNvPr id="6" name="삽화:경로질의_2.svg" descr="illust_8114574556608139953_1791717240.png"/>
+          <p:cNvPr id="6" name="삽화:경로질의_2.svg" descr="illust_6988349754820284815_1791717240.png"/>
           <p:cNvPicPr>
             <a:picLocks noChangeAspect="1"/>
           </p:cNvPicPr>
@@ -33508,7 +33508,7 @@
       </p:sp>
       <p:pic>
         <p:nvPicPr>
-          <p:cNvPr id="6" name="삽화:설비_유압파워팩.svg" descr="illust_471409922217336596_1791712364.png"/>
+          <p:cNvPr id="6" name="삽화:설비_유압파워팩.svg" descr="illust_6851436665870074451_1791712364.png"/>
           <p:cNvPicPr>
             <a:picLocks noChangeAspect="1"/>
           </p:cNvPicPr>
@@ -34724,7 +34724,7 @@
                 <a:ea typeface="맑은 고딕"/>
                 <a:cs typeface="맑은 고딕"/>
               </a:rPr>
-              <a:t>원인 후보를 가리고 조치안을 비교한 시간이다. 그동안 유온은 61.8 ℃까지 올랐다.</a:t>
+              <a:t>원인을 가리고 조치안을 비교하는 데 약 94초, 승인 대기에 약 13초. 유온은 61.8 ℃까지 올랐다.</a:t>
             </a:r>
           </a:p>
         </p:txBody>
@@ -35208,7 +35208,7 @@
       </p:sp>
       <p:pic>
         <p:nvPicPr>
-          <p:cNvPr id="6" name="삽화:원인후보.svg" descr="illust_3382546911389269495_1791712364.png"/>
+          <p:cNvPr id="6" name="삽화:원인후보.svg" descr="illust_5419619562420605937_1791712364.png"/>
           <p:cNvPicPr>
             <a:picLocks noChangeAspect="1"/>
           </p:cNvPicPr>
@@ -36747,7 +36747,7 @@
       </p:sp>
       <p:pic>
         <p:nvPicPr>
-          <p:cNvPr id="6" name="삽화:흩어진정보.svg" descr="illust_6522575610301938907_1791712364.png"/>
+          <p:cNvPr id="6" name="삽화:흩어진정보.svg" descr="illust_3839497937717814515_1791712364.png"/>
           <p:cNvPicPr>
             <a:picLocks noChangeAspect="1"/>
           </p:cNvPicPr>

--- a/course/slides/practical-offline/실전반_오프라인_01회차.pptx
+++ b/course/slides/practical-offline/실전반_오프라인_01회차.pptx
@@ -1313,7 +1313,7 @@
           <a:lstStyle/>
           <a:p>
             <a:r>
-              <a:t>유온 TS1이 설비의 어느 자리에서 생기는 값인지 보겠습니다. 탱크, 펌프, 부하, 오일 쿨러, 팬이 있고 TS1은 쿨러로 들어가기 직전의 작동유 온도입니다. 이 설비에서 난 사건 하나를 보겠습니다.</a:t>
+              <a:t>값이 처음 생기는 곳은 설비입니다. 유압 파워팩 HYD-01에는 탱크, 펌프, 부하, 오일 쿨러, 팬이 있고, 센서 값마다 태그라는 이름이 붙습니다. 이 회차에서 예로 쓰는 값은 쿨러로 들어가기 직전의 작동유 온도인 유온 TS1과, 쿨러가 열을 내보내는 정도인 냉각 효율 CE입니다. 이 설비에서 난 사건 하나를 보겠습니다.</a:t>
             </a:r>
           </a:p>
         </p:txBody>
@@ -8932,7 +8932,7 @@
       </p:sp>
       <p:pic>
         <p:nvPicPr>
-          <p:cNvPr id="6" name="삽화:노드관계.svg" descr="illust_5266731766817450087_1791712364.png"/>
+          <p:cNvPr id="6" name="삽화:노드관계.svg" descr="illust_791330002551546544_1791942820.png"/>
           <p:cNvPicPr>
             <a:picLocks noChangeAspect="1"/>
           </p:cNvPicPr>
@@ -9528,7 +9528,7 @@
       </p:sp>
       <p:pic>
         <p:nvPicPr>
-          <p:cNvPr id="6" name="삽화:관계.svg" descr="illust_2435265418410359055_1791712364.png"/>
+          <p:cNvPr id="6" name="삽화:관계.svg" descr="illust_7650794047263105439_1791942820.png"/>
           <p:cNvPicPr>
             <a:picLocks noChangeAspect="1"/>
           </p:cNvPicPr>
@@ -11153,7 +11153,7 @@
       </p:sp>
       <p:pic>
         <p:nvPicPr>
-          <p:cNvPr id="6" name="삽화:속성_3.svg" descr="illust_6615320472600019611_1791717240.png"/>
+          <p:cNvPr id="6" name="삽화:속성_3.svg" descr="illust_6425100127789408468_1791942820.png"/>
           <p:cNvPicPr>
             <a:picLocks noChangeAspect="1"/>
           </p:cNvPicPr>
@@ -12053,7 +12053,7 @@
       </p:sp>
       <p:pic>
         <p:nvPicPr>
-          <p:cNvPr id="6" name="삽화:두층_3.svg" descr="illust_2930574664814283529_1791717240.png"/>
+          <p:cNvPr id="6" name="삽화:두층_3.svg" descr="illust_8742687454321387712_1791942820.png"/>
           <p:cNvPicPr>
             <a:picLocks noChangeAspect="1"/>
           </p:cNvPicPr>
@@ -13152,7 +13152,7 @@
       </p:sp>
       <p:pic>
         <p:nvPicPr>
-          <p:cNvPr id="6" name="삽화:여러노드.svg" descr="illust_6867457382987765658_1791717240.png"/>
+          <p:cNvPr id="6" name="삽화:여러노드.svg" descr="illust_588678982977033466_1791942820.png"/>
           <p:cNvPicPr>
             <a:picLocks noChangeAspect="1"/>
           </p:cNvPicPr>
@@ -17937,7 +17937,7 @@
       </p:sp>
       <p:pic>
         <p:nvPicPr>
-          <p:cNvPr id="6" name="삽화:속성그래프_3.svg" descr="illust_3791173995094343989_1791717240.png"/>
+          <p:cNvPr id="6" name="삽화:속성그래프_3.svg" descr="illust_4748626111057599310_1791942820.png"/>
           <p:cNvPicPr>
             <a:picLocks noChangeAspect="1"/>
           </p:cNvPicPr>
@@ -20831,7 +20831,7 @@
       </p:sp>
       <p:pic>
         <p:nvPicPr>
-          <p:cNvPr id="6" name="삽화:경로질의_2.svg" descr="illust_6988349754820284815_1791717240.png"/>
+          <p:cNvPr id="6" name="삽화:경로질의_2.svg" descr="illust_5955813970577303494_1791942820.png"/>
           <p:cNvPicPr>
             <a:picLocks noChangeAspect="1"/>
           </p:cNvPicPr>
@@ -33508,7 +33508,7 @@
       </p:sp>
       <p:pic>
         <p:nvPicPr>
-          <p:cNvPr id="6" name="삽화:설비_유압파워팩.svg" descr="illust_6851436665870074451_1791712364.png"/>
+          <p:cNvPr id="6" name="삽화:설비_유압파워팩.svg" descr="illust_2452508839233837406_1791942820.png"/>
           <p:cNvPicPr>
             <a:picLocks noChangeAspect="1"/>
           </p:cNvPicPr>
@@ -35208,7 +35208,7 @@
       </p:sp>
       <p:pic>
         <p:nvPicPr>
-          <p:cNvPr id="6" name="삽화:원인후보.svg" descr="illust_5419619562420605937_1791712364.png"/>
+          <p:cNvPr id="6" name="삽화:원인후보.svg" descr="illust_8641696844853528257_1791942820.png"/>
           <p:cNvPicPr>
             <a:picLocks noChangeAspect="1"/>
           </p:cNvPicPr>
@@ -36747,7 +36747,7 @@
       </p:sp>
       <p:pic>
         <p:nvPicPr>
-          <p:cNvPr id="6" name="삽화:흩어진정보.svg" descr="illust_3839497937717814515_1791712364.png"/>
+          <p:cNvPr id="6" name="삽화:흩어진정보.svg" descr="illust_704341125235075004_1791942820.png"/>
           <p:cNvPicPr>
             <a:picLocks noChangeAspect="1"/>
           </p:cNvPicPr>

--- a/course/slides/practical-offline/실전반_오프라인_01회차.pptx
+++ b/course/slides/practical-offline/실전반_오프라인_01회차.pptx
@@ -1313,7 +1313,7 @@
           <a:lstStyle/>
           <a:p>
             <a:r>
-              <a:t>값이 처음 생기는 곳은 설비입니다. 유압 파워팩 HYD-01에는 탱크, 펌프, 부하, 오일 쿨러, 팬이 있고, 센서 값마다 태그라는 이름이 붙습니다. 이 회차에서 예로 쓰는 값은 쿨러로 들어가기 직전의 작동유 온도인 유온 TS1과, 쿨러가 열을 내보내는 정도인 냉각 효율 CE입니다. 이 설비에서 난 사건 하나를 보겠습니다.</a:t>
+              <a:t>데이터가 처음 생기는 곳은 설비입니다. 유압 파워팩 HYD-01에는 탱크, 펌프, 부하, 오일 쿨러, 팬이 있고, 계측값마다 태그라는 이름이 붙습니다. 이 회차에서 예로 쓰는 계측값은 쿨러로 들어가기 직전의 작동유 온도인 유온 TS1과, 쿨러가 열을 내보내는 정도인 냉각 효율 CE입니다. 이 설비에서 난 사건 하나를 보겠습니다.</a:t>
             </a:r>
           </a:p>
         </p:txBody>
@@ -8932,7 +8932,7 @@
       </p:sp>
       <p:pic>
         <p:nvPicPr>
-          <p:cNvPr id="6" name="삽화:노드관계.svg" descr="illust_791330002551546544_1791942820.png"/>
+          <p:cNvPr id="6" name="삽화:노드관계.svg" descr="illust_8588495730713793632_1791942820.png"/>
           <p:cNvPicPr>
             <a:picLocks noChangeAspect="1"/>
           </p:cNvPicPr>
@@ -9528,7 +9528,7 @@
       </p:sp>
       <p:pic>
         <p:nvPicPr>
-          <p:cNvPr id="6" name="삽화:관계.svg" descr="illust_7650794047263105439_1791942820.png"/>
+          <p:cNvPr id="6" name="삽화:관계.svg" descr="illust_1312247206439139788_1791942820.png"/>
           <p:cNvPicPr>
             <a:picLocks noChangeAspect="1"/>
           </p:cNvPicPr>
@@ -11153,7 +11153,7 @@
       </p:sp>
       <p:pic>
         <p:nvPicPr>
-          <p:cNvPr id="6" name="삽화:속성_3.svg" descr="illust_6425100127789408468_1791942820.png"/>
+          <p:cNvPr id="6" name="삽화:속성_3.svg" descr="illust_8958173151232418893_1791942820.png"/>
           <p:cNvPicPr>
             <a:picLocks noChangeAspect="1"/>
           </p:cNvPicPr>
@@ -12053,7 +12053,7 @@
       </p:sp>
       <p:pic>
         <p:nvPicPr>
-          <p:cNvPr id="6" name="삽화:두층_3.svg" descr="illust_8742687454321387712_1791942820.png"/>
+          <p:cNvPr id="6" name="삽화:두층_3.svg" descr="illust_8054056706295152747_1791942820.png"/>
           <p:cNvPicPr>
             <a:picLocks noChangeAspect="1"/>
           </p:cNvPicPr>
@@ -13152,7 +13152,7 @@
       </p:sp>
       <p:pic>
         <p:nvPicPr>
-          <p:cNvPr id="6" name="삽화:여러노드.svg" descr="illust_588678982977033466_1791942820.png"/>
+          <p:cNvPr id="6" name="삽화:여러노드.svg" descr="illust_896533225161039635_1791942820.png"/>
           <p:cNvPicPr>
             <a:picLocks noChangeAspect="1"/>
           </p:cNvPicPr>
@@ -17937,7 +17937,7 @@
       </p:sp>
       <p:pic>
         <p:nvPicPr>
-          <p:cNvPr id="6" name="삽화:속성그래프_3.svg" descr="illust_4748626111057599310_1791942820.png"/>
+          <p:cNvPr id="6" name="삽화:속성그래프_3.svg" descr="illust_1381320702879337282_1791942820.png"/>
           <p:cNvPicPr>
             <a:picLocks noChangeAspect="1"/>
           </p:cNvPicPr>
@@ -20831,7 +20831,7 @@
       </p:sp>
       <p:pic>
         <p:nvPicPr>
-          <p:cNvPr id="6" name="삽화:경로질의_2.svg" descr="illust_5955813970577303494_1791942820.png"/>
+          <p:cNvPr id="6" name="삽화:경로질의_2.svg" descr="illust_5056582291233220748_1791942820.png"/>
           <p:cNvPicPr>
             <a:picLocks noChangeAspect="1"/>
           </p:cNvPicPr>
@@ -33411,7 +33411,7 @@
                 <a:ea typeface="맑은 고딕"/>
                 <a:cs typeface="맑은 고딕"/>
               </a:rPr>
-              <a:t>센서 값마다 </a:t>
+              <a:t>계측값마다 </a:t>
             </a:r>
             <a:r>
               <a:rPr sz="1600" b="1">
@@ -33508,7 +33508,7 @@
       </p:sp>
       <p:pic>
         <p:nvPicPr>
-          <p:cNvPr id="6" name="삽화:설비_유압파워팩.svg" descr="illust_2452508839233837406_1791942820.png"/>
+          <p:cNvPr id="6" name="삽화:설비_유압파워팩.svg" descr="illust_3715061669898920044_1791942820.png"/>
           <p:cNvPicPr>
             <a:picLocks noChangeAspect="1"/>
           </p:cNvPicPr>
@@ -35208,7 +35208,7 @@
       </p:sp>
       <p:pic>
         <p:nvPicPr>
-          <p:cNvPr id="6" name="삽화:원인후보.svg" descr="illust_8641696844853528257_1791942820.png"/>
+          <p:cNvPr id="6" name="삽화:원인후보.svg" descr="illust_387455175634131242_1791942820.png"/>
           <p:cNvPicPr>
             <a:picLocks noChangeAspect="1"/>
           </p:cNvPicPr>
@@ -36747,7 +36747,7 @@
       </p:sp>
       <p:pic>
         <p:nvPicPr>
-          <p:cNvPr id="6" name="삽화:흩어진정보.svg" descr="illust_704341125235075004_1791942820.png"/>
+          <p:cNvPr id="6" name="삽화:흩어진정보.svg" descr="illust_209837462458260838_1791942820.png"/>
           <p:cNvPicPr>
             <a:picLocks noChangeAspect="1"/>
           </p:cNvPicPr>

--- a/course/slides/practical-offline/실전반_오프라인_01회차.pptx
+++ b/course/slides/practical-offline/실전반_오프라인_01회차.pptx
@@ -1313,7 +1313,7 @@
           <a:lstStyle/>
           <a:p>
             <a:r>
-              <a:t>데이터가 처음 생기는 곳은 설비입니다. 유압 파워팩 HYD-01에는 탱크, 펌프, 부하, 오일 쿨러, 팬이 있고, 계측값마다 태그라는 이름이 붙습니다. 이 회차에서 예로 쓰는 계측값은 쿨러로 들어가기 직전의 작동유 온도인 유온 TS1과, 쿨러가 열을 내보내는 정도인 냉각 효율 CE입니다. 이 설비에서 난 사건 하나를 보겠습니다.</a:t>
+              <a:t>데이터가 처음 생기는 곳은 설비입니다. 유압 파워팩 HYD-01에는 탱크, 펌프, 부하, 오일 쿨러, 팬이 있고, 계측값마다 태그라는 이름이 붙습니다. 이 회차에서 예로 드는 계측값은 쿨러로 들어가기 직전의 작동유 온도인 유온 TS1과, 쿨러가 열을 내보내는 정도를 나타내는 냉각 효율 CE입니다. 이 설비에서 난 사건 하나를 보겠습니다.</a:t>
             </a:r>
           </a:p>
         </p:txBody>
@@ -8932,7 +8932,7 @@
       </p:sp>
       <p:pic>
         <p:nvPicPr>
-          <p:cNvPr id="6" name="삽화:노드관계.svg" descr="illust_8588495730713793632_1791942820.png"/>
+          <p:cNvPr id="6" name="삽화:노드관계.svg" descr="illust_8146839056375369377_1791959960.png"/>
           <p:cNvPicPr>
             <a:picLocks noChangeAspect="1"/>
           </p:cNvPicPr>
@@ -9528,7 +9528,7 @@
       </p:sp>
       <p:pic>
         <p:nvPicPr>
-          <p:cNvPr id="6" name="삽화:관계.svg" descr="illust_1312247206439139788_1791942820.png"/>
+          <p:cNvPr id="6" name="삽화:관계.svg" descr="illust_8877063301076309177_1791959960.png"/>
           <p:cNvPicPr>
             <a:picLocks noChangeAspect="1"/>
           </p:cNvPicPr>
@@ -11153,7 +11153,7 @@
       </p:sp>
       <p:pic>
         <p:nvPicPr>
-          <p:cNvPr id="6" name="삽화:속성_3.svg" descr="illust_8958173151232418893_1791942820.png"/>
+          <p:cNvPr id="6" name="삽화:속성_3.svg" descr="illust_343329502185500898_1791959960.png"/>
           <p:cNvPicPr>
             <a:picLocks noChangeAspect="1"/>
           </p:cNvPicPr>
@@ -12053,7 +12053,7 @@
       </p:sp>
       <p:pic>
         <p:nvPicPr>
-          <p:cNvPr id="6" name="삽화:두층_3.svg" descr="illust_8054056706295152747_1791942820.png"/>
+          <p:cNvPr id="6" name="삽화:두층_3.svg" descr="illust_7596131240649715444_1791959960.png"/>
           <p:cNvPicPr>
             <a:picLocks noChangeAspect="1"/>
           </p:cNvPicPr>
@@ -13152,7 +13152,7 @@
       </p:sp>
       <p:pic>
         <p:nvPicPr>
-          <p:cNvPr id="6" name="삽화:여러노드.svg" descr="illust_896533225161039635_1791942820.png"/>
+          <p:cNvPr id="6" name="삽화:여러노드.svg" descr="illust_1573842031595591486_1791959960.png"/>
           <p:cNvPicPr>
             <a:picLocks noChangeAspect="1"/>
           </p:cNvPicPr>
@@ -17937,7 +17937,7 @@
       </p:sp>
       <p:pic>
         <p:nvPicPr>
-          <p:cNvPr id="6" name="삽화:속성그래프_3.svg" descr="illust_1381320702879337282_1791942820.png"/>
+          <p:cNvPr id="6" name="삽화:속성그래프_3.svg" descr="illust_7615851543284348186_1791959960.png"/>
           <p:cNvPicPr>
             <a:picLocks noChangeAspect="1"/>
           </p:cNvPicPr>
@@ -20831,7 +20831,7 @@
       </p:sp>
       <p:pic>
         <p:nvPicPr>
-          <p:cNvPr id="6" name="삽화:경로질의_2.svg" descr="illust_5056582291233220748_1791942820.png"/>
+          <p:cNvPr id="6" name="삽화:경로질의_2.svg" descr="illust_8251706356002160048_1791959960.png"/>
           <p:cNvPicPr>
             <a:picLocks noChangeAspect="1"/>
           </p:cNvPicPr>
@@ -33433,7 +33433,7 @@
                 <a:ea typeface="맑은 고딕"/>
                 <a:cs typeface="맑은 고딕"/>
               </a:rPr>
-              <a:t>(Tag)라는 이름이 붙으며, 유온 TS1은 오일 쿨러 입구에서 잰 작동유 온도이다.</a:t>
+              <a:t>(Tag)라는 이름이 붙으며, 유온 TS1은 오일 쿨러 입구에서 잰 작동유의 온도이다.</a:t>
             </a:r>
           </a:p>
         </p:txBody>
@@ -33508,7 +33508,7 @@
       </p:sp>
       <p:pic>
         <p:nvPicPr>
-          <p:cNvPr id="6" name="삽화:설비_유압파워팩.svg" descr="illust_3715061669898920044_1791942820.png"/>
+          <p:cNvPr id="6" name="삽화:설비_유압파워팩.svg" descr="illust_1756712209596933418_1791959960.png"/>
           <p:cNvPicPr>
             <a:picLocks noChangeAspect="1"/>
           </p:cNvPicPr>
@@ -35208,7 +35208,7 @@
       </p:sp>
       <p:pic>
         <p:nvPicPr>
-          <p:cNvPr id="6" name="삽화:원인후보.svg" descr="illust_387455175634131242_1791942820.png"/>
+          <p:cNvPr id="6" name="삽화:원인후보.svg" descr="illust_3906393560230145784_1791959960.png"/>
           <p:cNvPicPr>
             <a:picLocks noChangeAspect="1"/>
           </p:cNvPicPr>
@@ -36747,7 +36747,7 @@
       </p:sp>
       <p:pic>
         <p:nvPicPr>
-          <p:cNvPr id="6" name="삽화:흩어진정보.svg" descr="illust_209837462458260838_1791942820.png"/>
+          <p:cNvPr id="6" name="삽화:흩어진정보.svg" descr="illust_3982999523282271396_1791959960.png"/>
           <p:cNvPicPr>
             <a:picLocks noChangeAspect="1"/>
           </p:cNvPicPr>

--- a/course/slides/practical-offline/실전반_오프라인_01회차.pptx
+++ b/course/slides/practical-offline/실전반_오프라인_01회차.pptx
@@ -1313,7 +1313,7 @@
           <a:lstStyle/>
           <a:p>
             <a:r>
-              <a:t>데이터가 처음 생기는 곳은 설비입니다. 유압 파워팩 HYD-01에는 탱크, 펌프, 부하, 오일 쿨러, 팬이 있고, 계측값마다 태그라는 이름이 붙습니다. 이 회차에서 예로 드는 계측값은 쿨러로 들어가기 직전의 작동유 온도인 유온 TS1과, 쿨러가 열을 내보내는 정도를 나타내는 냉각 효율 CE입니다. 이 설비에서 난 사건 하나를 보겠습니다.</a:t>
+              <a:t>데이터가 처음 생기는 곳은 설비입니다. 유압 파워팩 HYD-01에는 탱크, 펌프, 부하, 오일 쿨러, 팬이 있고, 계측값마다 태그라는 이름이 붙습니다. 이 회차에서 예로 드는 계측값은 쿨러로 들어가기 직전의 작동유 온도인 유온 TS1과, 쿨러가 열을 내보내는 정도를 나타내는 냉각 효율 CE입니다. 냉각 효율은 센서로 직접 재지 않고 다른 계측값으로 계산하는 가상 센서(Virtual Sensor) 값입니다. 이 설비에서 난 사건 하나를 보겠습니다.</a:t>
             </a:r>
           </a:p>
         </p:txBody>
@@ -8932,7 +8932,7 @@
       </p:sp>
       <p:pic>
         <p:nvPicPr>
-          <p:cNvPr id="6" name="삽화:노드관계.svg" descr="illust_8146839056375369377_1791959960.png"/>
+          <p:cNvPr id="6" name="삽화:노드관계.svg" descr="illust_5164250902176217514_1791959960.png"/>
           <p:cNvPicPr>
             <a:picLocks noChangeAspect="1"/>
           </p:cNvPicPr>
@@ -9528,7 +9528,7 @@
       </p:sp>
       <p:pic>
         <p:nvPicPr>
-          <p:cNvPr id="6" name="삽화:관계.svg" descr="illust_8877063301076309177_1791959960.png"/>
+          <p:cNvPr id="6" name="삽화:관계.svg" descr="illust_2543234072896531853_1791959960.png"/>
           <p:cNvPicPr>
             <a:picLocks noChangeAspect="1"/>
           </p:cNvPicPr>
@@ -11153,7 +11153,7 @@
       </p:sp>
       <p:pic>
         <p:nvPicPr>
-          <p:cNvPr id="6" name="삽화:속성_3.svg" descr="illust_343329502185500898_1791959960.png"/>
+          <p:cNvPr id="6" name="삽화:속성_3.svg" descr="illust_9029980522661997491_1791959960.png"/>
           <p:cNvPicPr>
             <a:picLocks noChangeAspect="1"/>
           </p:cNvPicPr>
@@ -12053,7 +12053,7 @@
       </p:sp>
       <p:pic>
         <p:nvPicPr>
-          <p:cNvPr id="6" name="삽화:두층_3.svg" descr="illust_7596131240649715444_1791959960.png"/>
+          <p:cNvPr id="6" name="삽화:두층_3.svg" descr="illust_6792357083131648664_1791959960.png"/>
           <p:cNvPicPr>
             <a:picLocks noChangeAspect="1"/>
           </p:cNvPicPr>
@@ -13152,7 +13152,7 @@
       </p:sp>
       <p:pic>
         <p:nvPicPr>
-          <p:cNvPr id="6" name="삽화:여러노드.svg" descr="illust_1573842031595591486_1791959960.png"/>
+          <p:cNvPr id="6" name="삽화:여러노드.svg" descr="illust_3799208095957059607_1791959960.png"/>
           <p:cNvPicPr>
             <a:picLocks noChangeAspect="1"/>
           </p:cNvPicPr>
@@ -17937,7 +17937,7 @@
       </p:sp>
       <p:pic>
         <p:nvPicPr>
-          <p:cNvPr id="6" name="삽화:속성그래프_3.svg" descr="illust_7615851543284348186_1791959960.png"/>
+          <p:cNvPr id="6" name="삽화:속성그래프_3.svg" descr="illust_7441572464923281915_1791959960.png"/>
           <p:cNvPicPr>
             <a:picLocks noChangeAspect="1"/>
           </p:cNvPicPr>
@@ -20831,7 +20831,7 @@
       </p:sp>
       <p:pic>
         <p:nvPicPr>
-          <p:cNvPr id="6" name="삽화:경로질의_2.svg" descr="illust_8251706356002160048_1791959960.png"/>
+          <p:cNvPr id="6" name="삽화:경로질의_2.svg" descr="illust_2271143933277950523_1791959960.png"/>
           <p:cNvPicPr>
             <a:picLocks noChangeAspect="1"/>
           </p:cNvPicPr>
@@ -33508,7 +33508,7 @@
       </p:sp>
       <p:pic>
         <p:nvPicPr>
-          <p:cNvPr id="6" name="삽화:설비_유압파워팩.svg" descr="illust_1756712209596933418_1791959960.png"/>
+          <p:cNvPr id="6" name="삽화:설비_유압파워팩.svg" descr="illust_3752673297874570778_1791959960.png"/>
           <p:cNvPicPr>
             <a:picLocks noChangeAspect="1"/>
           </p:cNvPicPr>
@@ -33966,7 +33966,7 @@
                 <a:ea typeface="맑은 고딕"/>
                 <a:cs typeface="맑은 고딕"/>
               </a:rPr>
-              <a:t>쿨러가 열을 내보내는 정도</a:t>
+              <a:t>쿨러의 열 배출 정도</a:t>
             </a:r>
           </a:p>
           <a:p>
@@ -33987,7 +33987,7 @@
                 <a:ea typeface="맑은 고딕"/>
                 <a:cs typeface="맑은 고딕"/>
               </a:rPr>
-              <a:t>센서 없이 계산한 값</a:t>
+              <a:t>다른 값 기반 가상센서값</a:t>
             </a:r>
           </a:p>
           <a:p>
@@ -35208,7 +35208,7 @@
       </p:sp>
       <p:pic>
         <p:nvPicPr>
-          <p:cNvPr id="6" name="삽화:원인후보.svg" descr="illust_3906393560230145784_1791959960.png"/>
+          <p:cNvPr id="6" name="삽화:원인후보.svg" descr="illust_5366216628934390099_1791959960.png"/>
           <p:cNvPicPr>
             <a:picLocks noChangeAspect="1"/>
           </p:cNvPicPr>
@@ -36747,7 +36747,7 @@
       </p:sp>
       <p:pic>
         <p:nvPicPr>
-          <p:cNvPr id="6" name="삽화:흩어진정보.svg" descr="illust_3982999523282271396_1791959960.png"/>
+          <p:cNvPr id="6" name="삽화:흩어진정보.svg" descr="illust_2991239703782616864_1791959960.png"/>
           <p:cNvPicPr>
             <a:picLocks noChangeAspect="1"/>
           </p:cNvPicPr>

--- a/course/slides/practical-offline/실전반_오프라인_01회차.pptx
+++ b/course/slides/practical-offline/실전반_오프라인_01회차.pptx
@@ -8932,7 +8932,7 @@
       </p:sp>
       <p:pic>
         <p:nvPicPr>
-          <p:cNvPr id="6" name="삽화:노드관계.svg" descr="illust_5164250902176217514_1791959960.png"/>
+          <p:cNvPr id="6" name="삽화:노드관계.svg" descr="illust_2608891504566430661_1791959960.png"/>
           <p:cNvPicPr>
             <a:picLocks noChangeAspect="1"/>
           </p:cNvPicPr>
@@ -9528,7 +9528,7 @@
       </p:sp>
       <p:pic>
         <p:nvPicPr>
-          <p:cNvPr id="6" name="삽화:관계.svg" descr="illust_2543234072896531853_1791959960.png"/>
+          <p:cNvPr id="6" name="삽화:관계.svg" descr="illust_4834190524331872008_1791959960.png"/>
           <p:cNvPicPr>
             <a:picLocks noChangeAspect="1"/>
           </p:cNvPicPr>
@@ -11153,7 +11153,7 @@
       </p:sp>
       <p:pic>
         <p:nvPicPr>
-          <p:cNvPr id="6" name="삽화:속성_3.svg" descr="illust_9029980522661997491_1791959960.png"/>
+          <p:cNvPr id="6" name="삽화:속성_3.svg" descr="illust_8269169623615345826_1791959960.png"/>
           <p:cNvPicPr>
             <a:picLocks noChangeAspect="1"/>
           </p:cNvPicPr>
@@ -12053,7 +12053,7 @@
       </p:sp>
       <p:pic>
         <p:nvPicPr>
-          <p:cNvPr id="6" name="삽화:두층_3.svg" descr="illust_6792357083131648664_1791959960.png"/>
+          <p:cNvPr id="6" name="삽화:두층_3.svg" descr="illust_3727479025000312564_1791959960.png"/>
           <p:cNvPicPr>
             <a:picLocks noChangeAspect="1"/>
           </p:cNvPicPr>
@@ -13152,7 +13152,7 @@
       </p:sp>
       <p:pic>
         <p:nvPicPr>
-          <p:cNvPr id="6" name="삽화:여러노드.svg" descr="illust_3799208095957059607_1791959960.png"/>
+          <p:cNvPr id="6" name="삽화:여러노드.svg" descr="illust_4843376796757015354_1791959960.png"/>
           <p:cNvPicPr>
             <a:picLocks noChangeAspect="1"/>
           </p:cNvPicPr>
@@ -17937,7 +17937,7 @@
       </p:sp>
       <p:pic>
         <p:nvPicPr>
-          <p:cNvPr id="6" name="삽화:속성그래프_3.svg" descr="illust_7441572464923281915_1791959960.png"/>
+          <p:cNvPr id="6" name="삽화:속성그래프_3.svg" descr="illust_4693369431128850599_1791959960.png"/>
           <p:cNvPicPr>
             <a:picLocks noChangeAspect="1"/>
           </p:cNvPicPr>
@@ -20831,7 +20831,7 @@
       </p:sp>
       <p:pic>
         <p:nvPicPr>
-          <p:cNvPr id="6" name="삽화:경로질의_2.svg" descr="illust_2271143933277950523_1791959960.png"/>
+          <p:cNvPr id="6" name="삽화:경로질의_2.svg" descr="illust_559006800676373570_1791959960.png"/>
           <p:cNvPicPr>
             <a:picLocks noChangeAspect="1"/>
           </p:cNvPicPr>
@@ -33508,7 +33508,7 @@
       </p:sp>
       <p:pic>
         <p:nvPicPr>
-          <p:cNvPr id="6" name="삽화:설비_유압파워팩.svg" descr="illust_3752673297874570778_1791959960.png"/>
+          <p:cNvPr id="6" name="삽화:설비_유압파워팩.svg" descr="illust_5909813020813179933_1791959960.png"/>
           <p:cNvPicPr>
             <a:picLocks noChangeAspect="1"/>
           </p:cNvPicPr>
@@ -33966,7 +33966,7 @@
                 <a:ea typeface="맑은 고딕"/>
                 <a:cs typeface="맑은 고딕"/>
               </a:rPr>
-              <a:t>쿨러의 열 배출 정도</a:t>
+              <a:t>쿨러가 열을 빼내는 정도</a:t>
             </a:r>
           </a:p>
           <a:p>
@@ -35208,7 +35208,7 @@
       </p:sp>
       <p:pic>
         <p:nvPicPr>
-          <p:cNvPr id="6" name="삽화:원인후보.svg" descr="illust_5366216628934390099_1791959960.png"/>
+          <p:cNvPr id="6" name="삽화:원인후보.svg" descr="illust_2079619242533705206_1791959960.png"/>
           <p:cNvPicPr>
             <a:picLocks noChangeAspect="1"/>
           </p:cNvPicPr>
@@ -36747,7 +36747,7 @@
       </p:sp>
       <p:pic>
         <p:nvPicPr>
-          <p:cNvPr id="6" name="삽화:흩어진정보.svg" descr="illust_2991239703782616864_1791959960.png"/>
+          <p:cNvPr id="6" name="삽화:흩어진정보.svg" descr="illust_1551347540756330_1791959960.png"/>
           <p:cNvPicPr>
             <a:picLocks noChangeAspect="1"/>
           </p:cNvPicPr>
